--- a/4_Mar 26/4 - Model Fitting.pptx
+++ b/4_Mar 26/4 - Model Fitting.pptx
@@ -5,40 +5,41 @@
     <p:sldMasterId id="2147483648" r:id="rId1"/>
   </p:sldMasterIdLst>
   <p:notesMasterIdLst>
-    <p:notesMasterId r:id="rId18"/>
+    <p:notesMasterId r:id="rId19"/>
   </p:notesMasterIdLst>
   <p:sldIdLst>
     <p:sldId id="256" r:id="rId2"/>
-    <p:sldId id="257" r:id="rId3"/>
-    <p:sldId id="312" r:id="rId4"/>
-    <p:sldId id="259" r:id="rId5"/>
-    <p:sldId id="316" r:id="rId6"/>
-    <p:sldId id="314" r:id="rId7"/>
-    <p:sldId id="315" r:id="rId8"/>
-    <p:sldId id="261" r:id="rId9"/>
-    <p:sldId id="313" r:id="rId10"/>
-    <p:sldId id="262" r:id="rId11"/>
-    <p:sldId id="263" r:id="rId12"/>
-    <p:sldId id="264" r:id="rId13"/>
-    <p:sldId id="265" r:id="rId14"/>
-    <p:sldId id="282" r:id="rId15"/>
-    <p:sldId id="283" r:id="rId16"/>
-    <p:sldId id="269" r:id="rId17"/>
+    <p:sldId id="258" r:id="rId3"/>
+    <p:sldId id="257" r:id="rId4"/>
+    <p:sldId id="312" r:id="rId5"/>
+    <p:sldId id="259" r:id="rId6"/>
+    <p:sldId id="316" r:id="rId7"/>
+    <p:sldId id="314" r:id="rId8"/>
+    <p:sldId id="315" r:id="rId9"/>
+    <p:sldId id="261" r:id="rId10"/>
+    <p:sldId id="313" r:id="rId11"/>
+    <p:sldId id="262" r:id="rId12"/>
+    <p:sldId id="263" r:id="rId13"/>
+    <p:sldId id="264" r:id="rId14"/>
+    <p:sldId id="265" r:id="rId15"/>
+    <p:sldId id="282" r:id="rId16"/>
+    <p:sldId id="283" r:id="rId17"/>
+    <p:sldId id="269" r:id="rId18"/>
   </p:sldIdLst>
   <p:sldSz cx="12192000" cy="6858000"/>
   <p:notesSz cx="6858000" cy="9144000"/>
   <p:embeddedFontLst>
     <p:embeddedFont>
       <p:font typeface="Economica" panose="02000506040000020004" pitchFamily="2" charset="77"/>
-      <p:regular r:id="rId19"/>
-      <p:bold r:id="rId20"/>
-      <p:italic r:id="rId21"/>
-      <p:boldItalic r:id="rId22"/>
+      <p:regular r:id="rId20"/>
+      <p:bold r:id="rId21"/>
+      <p:italic r:id="rId22"/>
+      <p:boldItalic r:id="rId23"/>
     </p:embeddedFont>
     <p:embeddedFont>
       <p:font typeface="Quicksand" pitchFamily="2" charset="77"/>
-      <p:regular r:id="rId23"/>
-      <p:bold r:id="rId24"/>
+      <p:regular r:id="rId24"/>
+      <p:bold r:id="rId25"/>
     </p:embeddedFont>
   </p:embeddedFontLst>
   <p:defaultTextStyle>
@@ -1583,6 +1584,133 @@
   <p:cSld>
     <p:spTree>
       <p:nvGrpSpPr>
+        <p:cNvPr id="1" name="Shape 127">
+          <a:extLst>
+            <a:ext uri="{FF2B5EF4-FFF2-40B4-BE49-F238E27FC236}">
+              <a16:creationId xmlns:a16="http://schemas.microsoft.com/office/drawing/2014/main" id="{5E9AB5C2-14BF-A9FF-6BA9-5D96472E94BC}"/>
+            </a:ext>
+          </a:extLst>
+        </p:cNvPr>
+        <p:cNvGrpSpPr/>
+        <p:nvPr/>
+      </p:nvGrpSpPr>
+      <p:grpSpPr>
+        <a:xfrm>
+          <a:off x="0" y="0"/>
+          <a:ext cx="0" cy="0"/>
+          <a:chOff x="0" y="0"/>
+          <a:chExt cx="0" cy="0"/>
+        </a:xfrm>
+      </p:grpSpPr>
+      <p:sp>
+        <p:nvSpPr>
+          <p:cNvPr id="128" name="Google Shape;128;p6:notes">
+            <a:extLst>
+              <a:ext uri="{FF2B5EF4-FFF2-40B4-BE49-F238E27FC236}">
+                <a16:creationId xmlns:a16="http://schemas.microsoft.com/office/drawing/2014/main" id="{454311D2-1E4B-CB58-4ACD-D1493A50D65E}"/>
+              </a:ext>
+            </a:extLst>
+          </p:cNvPr>
+          <p:cNvSpPr txBox="1">
+            <a:spLocks noGrp="1"/>
+          </p:cNvSpPr>
+          <p:nvPr>
+            <p:ph type="body" idx="1"/>
+          </p:nvPr>
+        </p:nvSpPr>
+        <p:spPr>
+          <a:xfrm>
+            <a:off x="685800" y="4400550"/>
+            <a:ext cx="5486400" cy="3600450"/>
+          </a:xfrm>
+          <a:prstGeom prst="rect">
+            <a:avLst/>
+          </a:prstGeom>
+        </p:spPr>
+        <p:txBody>
+          <a:bodyPr spcFirstLastPara="1" wrap="square" lIns="91425" tIns="45700" rIns="91425" bIns="45700" anchor="t" anchorCtr="0">
+            <a:noAutofit/>
+          </a:bodyPr>
+          <a:lstStyle/>
+          <a:p>
+            <a:pPr marL="0" lvl="0" indent="0" algn="l" rtl="0">
+              <a:spcBef>
+                <a:spcPts val="0"/>
+              </a:spcBef>
+              <a:spcAft>
+                <a:spcPts val="0"/>
+              </a:spcAft>
+              <a:buNone/>
+            </a:pPr>
+            <a:endParaRPr/>
+          </a:p>
+        </p:txBody>
+      </p:sp>
+      <p:sp>
+        <p:nvSpPr>
+          <p:cNvPr id="129" name="Google Shape;129;p6:notes">
+            <a:extLst>
+              <a:ext uri="{FF2B5EF4-FFF2-40B4-BE49-F238E27FC236}">
+                <a16:creationId xmlns:a16="http://schemas.microsoft.com/office/drawing/2014/main" id="{13E95ACB-DA6E-2908-FB48-4CE466FBC748}"/>
+              </a:ext>
+            </a:extLst>
+          </p:cNvPr>
+          <p:cNvSpPr>
+            <a:spLocks noGrp="1" noRot="1" noChangeAspect="1"/>
+          </p:cNvSpPr>
+          <p:nvPr>
+            <p:ph type="sldImg" idx="2"/>
+          </p:nvPr>
+        </p:nvSpPr>
+        <p:spPr>
+          <a:xfrm>
+            <a:off x="685800" y="1143000"/>
+            <a:ext cx="5486400" cy="3086100"/>
+          </a:xfrm>
+          <a:custGeom>
+            <a:avLst/>
+            <a:gdLst/>
+            <a:ahLst/>
+            <a:cxnLst/>
+            <a:rect l="l" t="t" r="r" b="b"/>
+            <a:pathLst>
+              <a:path w="120000" h="120000" extrusionOk="0">
+                <a:moveTo>
+                  <a:pt x="0" y="0"/>
+                </a:moveTo>
+                <a:lnTo>
+                  <a:pt x="120000" y="0"/>
+                </a:lnTo>
+                <a:lnTo>
+                  <a:pt x="120000" y="120000"/>
+                </a:lnTo>
+                <a:lnTo>
+                  <a:pt x="0" y="120000"/>
+                </a:lnTo>
+                <a:close/>
+              </a:path>
+            </a:pathLst>
+          </a:custGeom>
+        </p:spPr>
+      </p:sp>
+    </p:spTree>
+    <p:extLst>
+      <p:ext uri="{BB962C8B-B14F-4D97-AF65-F5344CB8AC3E}">
+        <p14:creationId xmlns:p14="http://schemas.microsoft.com/office/powerpoint/2010/main" val="2173981037"/>
+      </p:ext>
+    </p:extLst>
+  </p:cSld>
+  <p:clrMapOvr>
+    <a:masterClrMapping/>
+  </p:clrMapOvr>
+</p:notes>
+</file>
+
+<file path=ppt/notesSlides/notesSlide11.xml><?xml version="1.0" encoding="utf-8"?>
+<p:notes xmlns:a="http://schemas.openxmlformats.org/drawingml/2006/main" xmlns:r="http://schemas.openxmlformats.org/officeDocument/2006/relationships" xmlns:p="http://schemas.openxmlformats.org/presentationml/2006/main" showMasterSp="0" showMasterPhAnim="0">
+  <p:cSld>
+    <p:spTree>
+      <p:nvGrpSpPr>
         <p:cNvPr id="1" name="Shape 134"/>
         <p:cNvGrpSpPr/>
         <p:nvPr/>
@@ -1682,7 +1810,7 @@
 </p:notes>
 </file>
 
-<file path=ppt/notesSlides/notesSlide11.xml><?xml version="1.0" encoding="utf-8"?>
+<file path=ppt/notesSlides/notesSlide12.xml><?xml version="1.0" encoding="utf-8"?>
 <p:notes xmlns:a="http://schemas.openxmlformats.org/drawingml/2006/main" xmlns:r="http://schemas.openxmlformats.org/officeDocument/2006/relationships" xmlns:p="http://schemas.openxmlformats.org/presentationml/2006/main" showMasterSp="0" showMasterPhAnim="0">
   <p:cSld>
     <p:spTree>
@@ -1786,7 +1914,7 @@
 </p:notes>
 </file>
 
-<file path=ppt/notesSlides/notesSlide12.xml><?xml version="1.0" encoding="utf-8"?>
+<file path=ppt/notesSlides/notesSlide13.xml><?xml version="1.0" encoding="utf-8"?>
 <p:notes xmlns:a="http://schemas.openxmlformats.org/drawingml/2006/main" xmlns:r="http://schemas.openxmlformats.org/officeDocument/2006/relationships" xmlns:p="http://schemas.openxmlformats.org/presentationml/2006/main" showMasterSp="0" showMasterPhAnim="0">
   <p:cSld>
     <p:spTree>
@@ -1890,7 +2018,7 @@
 </p:notes>
 </file>
 
-<file path=ppt/notesSlides/notesSlide13.xml><?xml version="1.0" encoding="utf-8"?>
+<file path=ppt/notesSlides/notesSlide14.xml><?xml version="1.0" encoding="utf-8"?>
 <p:notes xmlns:a="http://schemas.openxmlformats.org/drawingml/2006/main" xmlns:r="http://schemas.openxmlformats.org/officeDocument/2006/relationships" xmlns:p="http://schemas.openxmlformats.org/presentationml/2006/main" showMasterSp="0" showMasterPhAnim="0">
   <p:cSld>
     <p:spTree>
@@ -1994,7 +2122,7 @@
 </p:notes>
 </file>
 
-<file path=ppt/notesSlides/notesSlide14.xml><?xml version="1.0" encoding="utf-8"?>
+<file path=ppt/notesSlides/notesSlide15.xml><?xml version="1.0" encoding="utf-8"?>
 <p:notes xmlns:a="http://schemas.openxmlformats.org/drawingml/2006/main" xmlns:r="http://schemas.openxmlformats.org/officeDocument/2006/relationships" xmlns:p="http://schemas.openxmlformats.org/presentationml/2006/main" showMasterSp="0" showMasterPhAnim="0">
   <p:cSld>
     <p:spTree>
@@ -2172,7 +2300,7 @@
             </a:pPr>
             <a:fld id="{00000000-1234-1234-1234-123412341234}" type="slidenum">
               <a:rPr lang="en-US"/>
-              <a:t>15</a:t>
+              <a:t>16</a:t>
             </a:fld>
             <a:endParaRPr/>
           </a:p>
@@ -2191,7 +2319,7 @@
 </p:notes>
 </file>
 
-<file path=ppt/notesSlides/notesSlide15.xml><?xml version="1.0" encoding="utf-8"?>
+<file path=ppt/notesSlides/notesSlide16.xml><?xml version="1.0" encoding="utf-8"?>
 <p:notes xmlns:a="http://schemas.openxmlformats.org/drawingml/2006/main" xmlns:r="http://schemas.openxmlformats.org/officeDocument/2006/relationships" xmlns:p="http://schemas.openxmlformats.org/presentationml/2006/main" showMasterSp="0" showMasterPhAnim="0">
   <p:cSld>
     <p:spTree>
@@ -2345,7 +2473,7 @@
             </a:pPr>
             <a:fld id="{00000000-1234-1234-1234-123412341234}" type="slidenum">
               <a:rPr lang="en-US"/>
-              <a:t>16</a:t>
+              <a:t>17</a:t>
             </a:fld>
             <a:endParaRPr/>
           </a:p>
@@ -2360,6 +2488,110 @@
 </file>
 
 <file path=ppt/notesSlides/notesSlide2.xml><?xml version="1.0" encoding="utf-8"?>
+<p:notes xmlns:a="http://schemas.openxmlformats.org/drawingml/2006/main" xmlns:r="http://schemas.openxmlformats.org/officeDocument/2006/relationships" xmlns:p="http://schemas.openxmlformats.org/presentationml/2006/main" showMasterSp="0" showMasterPhAnim="0">
+  <p:cSld>
+    <p:spTree>
+      <p:nvGrpSpPr>
+        <p:cNvPr id="1" name="Shape 104"/>
+        <p:cNvGrpSpPr/>
+        <p:nvPr/>
+      </p:nvGrpSpPr>
+      <p:grpSpPr>
+        <a:xfrm>
+          <a:off x="0" y="0"/>
+          <a:ext cx="0" cy="0"/>
+          <a:chOff x="0" y="0"/>
+          <a:chExt cx="0" cy="0"/>
+        </a:xfrm>
+      </p:grpSpPr>
+      <p:sp>
+        <p:nvSpPr>
+          <p:cNvPr id="105" name="Google Shape;105;p3:notes"/>
+          <p:cNvSpPr txBox="1">
+            <a:spLocks noGrp="1"/>
+          </p:cNvSpPr>
+          <p:nvPr>
+            <p:ph type="body" idx="1"/>
+          </p:nvPr>
+        </p:nvSpPr>
+        <p:spPr>
+          <a:xfrm>
+            <a:off x="685800" y="4400550"/>
+            <a:ext cx="5486400" cy="3600450"/>
+          </a:xfrm>
+          <a:prstGeom prst="rect">
+            <a:avLst/>
+          </a:prstGeom>
+        </p:spPr>
+        <p:txBody>
+          <a:bodyPr spcFirstLastPara="1" wrap="square" lIns="91425" tIns="45700" rIns="91425" bIns="45700" anchor="t" anchorCtr="0">
+            <a:noAutofit/>
+          </a:bodyPr>
+          <a:lstStyle/>
+          <a:p>
+            <a:pPr marL="0" lvl="0" indent="0" algn="l" rtl="0">
+              <a:spcBef>
+                <a:spcPts val="0"/>
+              </a:spcBef>
+              <a:spcAft>
+                <a:spcPts val="0"/>
+              </a:spcAft>
+              <a:buNone/>
+            </a:pPr>
+            <a:endParaRPr/>
+          </a:p>
+        </p:txBody>
+      </p:sp>
+      <p:sp>
+        <p:nvSpPr>
+          <p:cNvPr id="106" name="Google Shape;106;p3:notes"/>
+          <p:cNvSpPr>
+            <a:spLocks noGrp="1" noRot="1" noChangeAspect="1"/>
+          </p:cNvSpPr>
+          <p:nvPr>
+            <p:ph type="sldImg" idx="2"/>
+          </p:nvPr>
+        </p:nvSpPr>
+        <p:spPr>
+          <a:xfrm>
+            <a:off x="685800" y="1143000"/>
+            <a:ext cx="5486400" cy="3086100"/>
+          </a:xfrm>
+          <a:custGeom>
+            <a:avLst/>
+            <a:gdLst/>
+            <a:ahLst/>
+            <a:cxnLst/>
+            <a:rect l="l" t="t" r="r" b="b"/>
+            <a:pathLst>
+              <a:path w="120000" h="120000" extrusionOk="0">
+                <a:moveTo>
+                  <a:pt x="0" y="0"/>
+                </a:moveTo>
+                <a:lnTo>
+                  <a:pt x="120000" y="0"/>
+                </a:lnTo>
+                <a:lnTo>
+                  <a:pt x="120000" y="120000"/>
+                </a:lnTo>
+                <a:lnTo>
+                  <a:pt x="0" y="120000"/>
+                </a:lnTo>
+                <a:close/>
+              </a:path>
+            </a:pathLst>
+          </a:custGeom>
+        </p:spPr>
+      </p:sp>
+    </p:spTree>
+  </p:cSld>
+  <p:clrMapOvr>
+    <a:masterClrMapping/>
+  </p:clrMapOvr>
+</p:notes>
+</file>
+
+<file path=ppt/notesSlides/notesSlide3.xml><?xml version="1.0" encoding="utf-8"?>
 <p:notes xmlns:a="http://schemas.openxmlformats.org/drawingml/2006/main" xmlns:r="http://schemas.openxmlformats.org/officeDocument/2006/relationships" xmlns:p="http://schemas.openxmlformats.org/presentationml/2006/main" showMasterSp="0" showMasterPhAnim="0">
   <p:cSld>
     <p:spTree>
@@ -2463,7 +2695,7 @@
 </p:notes>
 </file>
 
-<file path=ppt/notesSlides/notesSlide3.xml><?xml version="1.0" encoding="utf-8"?>
+<file path=ppt/notesSlides/notesSlide4.xml><?xml version="1.0" encoding="utf-8"?>
 <p:notes xmlns:a="http://schemas.openxmlformats.org/drawingml/2006/main" xmlns:r="http://schemas.openxmlformats.org/officeDocument/2006/relationships" xmlns:p="http://schemas.openxmlformats.org/presentationml/2006/main" showMasterSp="0" showMasterPhAnim="0">
   <p:cSld>
     <p:spTree>
@@ -2590,7 +2822,7 @@
 </p:notes>
 </file>
 
-<file path=ppt/notesSlides/notesSlide4.xml><?xml version="1.0" encoding="utf-8"?>
+<file path=ppt/notesSlides/notesSlide5.xml><?xml version="1.0" encoding="utf-8"?>
 <p:notes xmlns:a="http://schemas.openxmlformats.org/drawingml/2006/main" xmlns:r="http://schemas.openxmlformats.org/officeDocument/2006/relationships" xmlns:p="http://schemas.openxmlformats.org/presentationml/2006/main" showMasterSp="0" showMasterPhAnim="0">
   <p:cSld>
     <p:spTree>
@@ -2694,7 +2926,7 @@
 </p:notes>
 </file>
 
-<file path=ppt/notesSlides/notesSlide5.xml><?xml version="1.0" encoding="utf-8"?>
+<file path=ppt/notesSlides/notesSlide6.xml><?xml version="1.0" encoding="utf-8"?>
 <p:notes xmlns:a="http://schemas.openxmlformats.org/drawingml/2006/main" xmlns:r="http://schemas.openxmlformats.org/officeDocument/2006/relationships" xmlns:p="http://schemas.openxmlformats.org/presentationml/2006/main" showMasterSp="0" showMasterPhAnim="0">
   <p:cSld>
     <p:spTree>
@@ -2821,7 +3053,7 @@
 </p:notes>
 </file>
 
-<file path=ppt/notesSlides/notesSlide6.xml><?xml version="1.0" encoding="utf-8"?>
+<file path=ppt/notesSlides/notesSlide7.xml><?xml version="1.0" encoding="utf-8"?>
 <p:notes xmlns:a="http://schemas.openxmlformats.org/drawingml/2006/main" xmlns:r="http://schemas.openxmlformats.org/officeDocument/2006/relationships" xmlns:p="http://schemas.openxmlformats.org/presentationml/2006/main" showMasterSp="0" showMasterPhAnim="0">
   <p:cSld>
     <p:spTree>
@@ -2948,7 +3180,7 @@
 </p:notes>
 </file>
 
-<file path=ppt/notesSlides/notesSlide7.xml><?xml version="1.0" encoding="utf-8"?>
+<file path=ppt/notesSlides/notesSlide8.xml><?xml version="1.0" encoding="utf-8"?>
 <p:notes xmlns:a="http://schemas.openxmlformats.org/drawingml/2006/main" xmlns:r="http://schemas.openxmlformats.org/officeDocument/2006/relationships" xmlns:p="http://schemas.openxmlformats.org/presentationml/2006/main" showMasterSp="0" showMasterPhAnim="0">
   <p:cSld>
     <p:spTree>
@@ -3075,7 +3307,7 @@
 </p:notes>
 </file>
 
-<file path=ppt/notesSlides/notesSlide8.xml><?xml version="1.0" encoding="utf-8"?>
+<file path=ppt/notesSlides/notesSlide9.xml><?xml version="1.0" encoding="utf-8"?>
 <p:notes xmlns:a="http://schemas.openxmlformats.org/drawingml/2006/main" xmlns:r="http://schemas.openxmlformats.org/officeDocument/2006/relationships" xmlns:p="http://schemas.openxmlformats.org/presentationml/2006/main" showMasterSp="0" showMasterPhAnim="0">
   <p:cSld>
     <p:spTree>
@@ -3172,133 +3404,6 @@
         </p:spPr>
       </p:sp>
     </p:spTree>
-  </p:cSld>
-  <p:clrMapOvr>
-    <a:masterClrMapping/>
-  </p:clrMapOvr>
-</p:notes>
-</file>
-
-<file path=ppt/notesSlides/notesSlide9.xml><?xml version="1.0" encoding="utf-8"?>
-<p:notes xmlns:a="http://schemas.openxmlformats.org/drawingml/2006/main" xmlns:r="http://schemas.openxmlformats.org/officeDocument/2006/relationships" xmlns:p="http://schemas.openxmlformats.org/presentationml/2006/main" showMasterSp="0" showMasterPhAnim="0">
-  <p:cSld>
-    <p:spTree>
-      <p:nvGrpSpPr>
-        <p:cNvPr id="1" name="Shape 127">
-          <a:extLst>
-            <a:ext uri="{FF2B5EF4-FFF2-40B4-BE49-F238E27FC236}">
-              <a16:creationId xmlns:a16="http://schemas.microsoft.com/office/drawing/2014/main" id="{5E9AB5C2-14BF-A9FF-6BA9-5D96472E94BC}"/>
-            </a:ext>
-          </a:extLst>
-        </p:cNvPr>
-        <p:cNvGrpSpPr/>
-        <p:nvPr/>
-      </p:nvGrpSpPr>
-      <p:grpSpPr>
-        <a:xfrm>
-          <a:off x="0" y="0"/>
-          <a:ext cx="0" cy="0"/>
-          <a:chOff x="0" y="0"/>
-          <a:chExt cx="0" cy="0"/>
-        </a:xfrm>
-      </p:grpSpPr>
-      <p:sp>
-        <p:nvSpPr>
-          <p:cNvPr id="128" name="Google Shape;128;p6:notes">
-            <a:extLst>
-              <a:ext uri="{FF2B5EF4-FFF2-40B4-BE49-F238E27FC236}">
-                <a16:creationId xmlns:a16="http://schemas.microsoft.com/office/drawing/2014/main" id="{454311D2-1E4B-CB58-4ACD-D1493A50D65E}"/>
-              </a:ext>
-            </a:extLst>
-          </p:cNvPr>
-          <p:cNvSpPr txBox="1">
-            <a:spLocks noGrp="1"/>
-          </p:cNvSpPr>
-          <p:nvPr>
-            <p:ph type="body" idx="1"/>
-          </p:nvPr>
-        </p:nvSpPr>
-        <p:spPr>
-          <a:xfrm>
-            <a:off x="685800" y="4400550"/>
-            <a:ext cx="5486400" cy="3600450"/>
-          </a:xfrm>
-          <a:prstGeom prst="rect">
-            <a:avLst/>
-          </a:prstGeom>
-        </p:spPr>
-        <p:txBody>
-          <a:bodyPr spcFirstLastPara="1" wrap="square" lIns="91425" tIns="45700" rIns="91425" bIns="45700" anchor="t" anchorCtr="0">
-            <a:noAutofit/>
-          </a:bodyPr>
-          <a:lstStyle/>
-          <a:p>
-            <a:pPr marL="0" lvl="0" indent="0" algn="l" rtl="0">
-              <a:spcBef>
-                <a:spcPts val="0"/>
-              </a:spcBef>
-              <a:spcAft>
-                <a:spcPts val="0"/>
-              </a:spcAft>
-              <a:buNone/>
-            </a:pPr>
-            <a:endParaRPr/>
-          </a:p>
-        </p:txBody>
-      </p:sp>
-      <p:sp>
-        <p:nvSpPr>
-          <p:cNvPr id="129" name="Google Shape;129;p6:notes">
-            <a:extLst>
-              <a:ext uri="{FF2B5EF4-FFF2-40B4-BE49-F238E27FC236}">
-                <a16:creationId xmlns:a16="http://schemas.microsoft.com/office/drawing/2014/main" id="{13E95ACB-DA6E-2908-FB48-4CE466FBC748}"/>
-              </a:ext>
-            </a:extLst>
-          </p:cNvPr>
-          <p:cNvSpPr>
-            <a:spLocks noGrp="1" noRot="1" noChangeAspect="1"/>
-          </p:cNvSpPr>
-          <p:nvPr>
-            <p:ph type="sldImg" idx="2"/>
-          </p:nvPr>
-        </p:nvSpPr>
-        <p:spPr>
-          <a:xfrm>
-            <a:off x="685800" y="1143000"/>
-            <a:ext cx="5486400" cy="3086100"/>
-          </a:xfrm>
-          <a:custGeom>
-            <a:avLst/>
-            <a:gdLst/>
-            <a:ahLst/>
-            <a:cxnLst/>
-            <a:rect l="l" t="t" r="r" b="b"/>
-            <a:pathLst>
-              <a:path w="120000" h="120000" extrusionOk="0">
-                <a:moveTo>
-                  <a:pt x="0" y="0"/>
-                </a:moveTo>
-                <a:lnTo>
-                  <a:pt x="120000" y="0"/>
-                </a:lnTo>
-                <a:lnTo>
-                  <a:pt x="120000" y="120000"/>
-                </a:lnTo>
-                <a:lnTo>
-                  <a:pt x="0" y="120000"/>
-                </a:lnTo>
-                <a:close/>
-              </a:path>
-            </a:pathLst>
-          </a:custGeom>
-        </p:spPr>
-      </p:sp>
-    </p:spTree>
-    <p:extLst>
-      <p:ext uri="{BB962C8B-B14F-4D97-AF65-F5344CB8AC3E}">
-        <p14:creationId xmlns:p14="http://schemas.microsoft.com/office/powerpoint/2010/main" val="2173981037"/>
-      </p:ext>
-    </p:extLst>
   </p:cSld>
   <p:clrMapOvr>
     <a:masterClrMapping/>
@@ -13657,6 +13762,289 @@
   <p:cSld>
     <p:spTree>
       <p:nvGrpSpPr>
+        <p:cNvPr id="1" name="Shape 130">
+          <a:extLst>
+            <a:ext uri="{FF2B5EF4-FFF2-40B4-BE49-F238E27FC236}">
+              <a16:creationId xmlns:a16="http://schemas.microsoft.com/office/drawing/2014/main" id="{F8A5A9F4-C20D-E42F-765F-1C95A4A28D76}"/>
+            </a:ext>
+          </a:extLst>
+        </p:cNvPr>
+        <p:cNvGrpSpPr/>
+        <p:nvPr/>
+      </p:nvGrpSpPr>
+      <p:grpSpPr>
+        <a:xfrm>
+          <a:off x="0" y="0"/>
+          <a:ext cx="0" cy="0"/>
+          <a:chOff x="0" y="0"/>
+          <a:chExt cx="0" cy="0"/>
+        </a:xfrm>
+      </p:grpSpPr>
+      <p:sp>
+        <p:nvSpPr>
+          <p:cNvPr id="131" name="Google Shape;131;p6">
+            <a:extLst>
+              <a:ext uri="{FF2B5EF4-FFF2-40B4-BE49-F238E27FC236}">
+                <a16:creationId xmlns:a16="http://schemas.microsoft.com/office/drawing/2014/main" id="{546E8232-62B7-D42C-1E89-41CA0C69E8AB}"/>
+              </a:ext>
+            </a:extLst>
+          </p:cNvPr>
+          <p:cNvSpPr txBox="1"/>
+          <p:nvPr/>
+        </p:nvSpPr>
+        <p:spPr>
+          <a:xfrm>
+            <a:off x="2865521" y="586938"/>
+            <a:ext cx="6460957" cy="923330"/>
+          </a:xfrm>
+          <a:prstGeom prst="rect">
+            <a:avLst/>
+          </a:prstGeom>
+          <a:noFill/>
+          <a:ln>
+            <a:noFill/>
+          </a:ln>
+        </p:spPr>
+        <p:txBody>
+          <a:bodyPr spcFirstLastPara="1" wrap="square" lIns="91425" tIns="45700" rIns="91425" bIns="45700" anchor="t" anchorCtr="0">
+            <a:spAutoFit/>
+          </a:bodyPr>
+          <a:lstStyle/>
+          <a:p>
+            <a:pPr marL="0" marR="0" lvl="0" indent="0" algn="ctr" rtl="0">
+              <a:spcBef>
+                <a:spcPts val="0"/>
+              </a:spcBef>
+              <a:spcAft>
+                <a:spcPts val="0"/>
+              </a:spcAft>
+              <a:buNone/>
+            </a:pPr>
+            <a:r>
+              <a:rPr lang="en-US" sz="5400" dirty="0">
+                <a:solidFill>
+                  <a:schemeClr val="dk1"/>
+                </a:solidFill>
+                <a:latin typeface="Economica"/>
+                <a:ea typeface="Economica"/>
+                <a:cs typeface="Economica"/>
+                <a:sym typeface="Economica"/>
+              </a:rPr>
+              <a:t>Batch Normalization</a:t>
+            </a:r>
+            <a:endParaRPr dirty="0"/>
+          </a:p>
+        </p:txBody>
+      </p:sp>
+      <p:sp>
+        <p:nvSpPr>
+          <p:cNvPr id="132" name="Google Shape;132;p6">
+            <a:extLst>
+              <a:ext uri="{FF2B5EF4-FFF2-40B4-BE49-F238E27FC236}">
+                <a16:creationId xmlns:a16="http://schemas.microsoft.com/office/drawing/2014/main" id="{C6C7B91E-7FB5-0741-0846-F1C44B3F842F}"/>
+              </a:ext>
+            </a:extLst>
+          </p:cNvPr>
+          <p:cNvSpPr txBox="1"/>
+          <p:nvPr/>
+        </p:nvSpPr>
+        <p:spPr>
+          <a:xfrm>
+            <a:off x="890337" y="1940249"/>
+            <a:ext cx="10016362" cy="3662501"/>
+          </a:xfrm>
+          <a:prstGeom prst="rect">
+            <a:avLst/>
+          </a:prstGeom>
+          <a:noFill/>
+          <a:ln>
+            <a:noFill/>
+          </a:ln>
+        </p:spPr>
+        <p:txBody>
+          <a:bodyPr spcFirstLastPara="1" wrap="square" lIns="91425" tIns="45700" rIns="91425" bIns="45700" anchor="t" anchorCtr="0">
+            <a:spAutoFit/>
+          </a:bodyPr>
+          <a:lstStyle/>
+          <a:p>
+            <a:pPr marL="0" marR="0" lvl="0" indent="0" algn="l" rtl="0">
+              <a:spcBef>
+                <a:spcPts val="0"/>
+              </a:spcBef>
+              <a:spcAft>
+                <a:spcPts val="0"/>
+              </a:spcAft>
+              <a:buNone/>
+            </a:pPr>
+            <a:r>
+              <a:rPr lang="en-US" sz="2000" b="1" dirty="0">
+                <a:solidFill>
+                  <a:schemeClr val="dk1"/>
+                </a:solidFill>
+                <a:latin typeface="Quicksand"/>
+                <a:sym typeface="Quicksand"/>
+              </a:rPr>
+              <a:t>Re-scales batch coming into each layer, to make it unit-normal distributed. </a:t>
+            </a:r>
+            <a:endParaRPr dirty="0"/>
+          </a:p>
+          <a:p>
+            <a:pPr marL="171450" marR="0" lvl="0" indent="-82550" algn="l" rtl="0">
+              <a:spcBef>
+                <a:spcPts val="0"/>
+              </a:spcBef>
+              <a:spcAft>
+                <a:spcPts val="0"/>
+              </a:spcAft>
+              <a:buClr>
+                <a:schemeClr val="dk1"/>
+              </a:buClr>
+              <a:buSzPts val="1400"/>
+              <a:buFont typeface="Arial"/>
+              <a:buNone/>
+            </a:pPr>
+            <a:endParaRPr sz="1400" dirty="0">
+              <a:solidFill>
+                <a:schemeClr val="dk1"/>
+              </a:solidFill>
+              <a:latin typeface="Quicksand"/>
+              <a:ea typeface="Quicksand"/>
+              <a:cs typeface="Quicksand"/>
+              <a:sym typeface="Quicksand"/>
+            </a:endParaRPr>
+          </a:p>
+          <a:p>
+            <a:pPr marL="628650" marR="0" lvl="1" indent="-171450" algn="l" rtl="0">
+              <a:spcBef>
+                <a:spcPts val="0"/>
+              </a:spcBef>
+              <a:spcAft>
+                <a:spcPts val="0"/>
+              </a:spcAft>
+              <a:buClr>
+                <a:schemeClr val="dk1"/>
+              </a:buClr>
+              <a:buSzPts val="1800"/>
+              <a:buFont typeface="Arial"/>
+              <a:buChar char="•"/>
+            </a:pPr>
+            <a:r>
+              <a:rPr lang="en-US" sz="1800" b="0" i="0" u="none" strike="noStrike" cap="none" dirty="0">
+                <a:solidFill>
+                  <a:schemeClr val="dk1"/>
+                </a:solidFill>
+                <a:latin typeface="Quicksand"/>
+                <a:ea typeface="Quicksand"/>
+                <a:cs typeface="Quicksand"/>
+                <a:sym typeface="Quicksand"/>
+              </a:rPr>
+              <a:t>The primary reason for these layers is to improve/speed up trainin</a:t>
+            </a:r>
+            <a:r>
+              <a:rPr lang="en-US" sz="1800" dirty="0">
+                <a:solidFill>
+                  <a:schemeClr val="dk1"/>
+                </a:solidFill>
+                <a:latin typeface="Quicksand"/>
+                <a:ea typeface="Quicksand"/>
+                <a:cs typeface="Quicksand"/>
+                <a:sym typeface="Quicksand"/>
+              </a:rPr>
+              <a:t>g. Absent this, changes to up-funnel weights cause ‘shifts’ in the distribution of data entering later layers. Later layers’ weights need to be updated constantly to adapt to those up-stream shifts. Batch normalization removes this issue. </a:t>
+            </a:r>
+            <a:br>
+              <a:rPr lang="en-US" sz="1800" dirty="0">
+                <a:solidFill>
+                  <a:schemeClr val="dk1"/>
+                </a:solidFill>
+                <a:latin typeface="Quicksand"/>
+                <a:ea typeface="Quicksand"/>
+                <a:cs typeface="Quicksand"/>
+                <a:sym typeface="Quicksand"/>
+              </a:rPr>
+            </a:br>
+            <a:endParaRPr lang="en-US" sz="1800" dirty="0">
+              <a:solidFill>
+                <a:schemeClr val="dk1"/>
+              </a:solidFill>
+              <a:latin typeface="Quicksand"/>
+              <a:ea typeface="Quicksand"/>
+              <a:cs typeface="Quicksand"/>
+              <a:sym typeface="Quicksand"/>
+            </a:endParaRPr>
+          </a:p>
+          <a:p>
+            <a:pPr marL="628650" marR="0" lvl="1" indent="-171450" algn="l" rtl="0">
+              <a:spcBef>
+                <a:spcPts val="0"/>
+              </a:spcBef>
+              <a:spcAft>
+                <a:spcPts val="0"/>
+              </a:spcAft>
+              <a:buClr>
+                <a:schemeClr val="dk1"/>
+              </a:buClr>
+              <a:buSzPts val="1800"/>
+              <a:buFont typeface="Arial"/>
+              <a:buChar char="•"/>
+            </a:pPr>
+            <a:r>
+              <a:rPr lang="en-US" sz="1800" dirty="0">
+                <a:solidFill>
+                  <a:schemeClr val="dk1"/>
+                </a:solidFill>
+                <a:latin typeface="Quicksand"/>
+                <a:sym typeface="Quicksand"/>
+              </a:rPr>
+              <a:t>A by-product of batch normalization is that it acts like a weak form of Dropout, because normalization is implemented based on the current batch of data. Mean and variance estimates from the current batch are a noisy reflection of population mean and variance. Hence, we get some noise being injected in the training process as a result.</a:t>
+            </a:r>
+            <a:endParaRPr dirty="0"/>
+          </a:p>
+          <a:p>
+            <a:pPr marL="628650" marR="0" lvl="1" indent="-57150" algn="l" rtl="0">
+              <a:spcBef>
+                <a:spcPts val="0"/>
+              </a:spcBef>
+              <a:spcAft>
+                <a:spcPts val="0"/>
+              </a:spcAft>
+              <a:buClr>
+                <a:schemeClr val="dk1"/>
+              </a:buClr>
+              <a:buSzPts val="1800"/>
+              <a:buFont typeface="Arial"/>
+              <a:buNone/>
+            </a:pPr>
+            <a:endParaRPr sz="1800" b="0" i="0" u="none" strike="noStrike" cap="none" dirty="0">
+              <a:solidFill>
+                <a:schemeClr val="dk1"/>
+              </a:solidFill>
+              <a:latin typeface="Quicksand"/>
+              <a:ea typeface="Quicksand"/>
+              <a:cs typeface="Quicksand"/>
+              <a:sym typeface="Quicksand"/>
+            </a:endParaRPr>
+          </a:p>
+        </p:txBody>
+      </p:sp>
+    </p:spTree>
+    <p:extLst>
+      <p:ext uri="{BB962C8B-B14F-4D97-AF65-F5344CB8AC3E}">
+        <p14:creationId xmlns:p14="http://schemas.microsoft.com/office/powerpoint/2010/main" val="2210597179"/>
+      </p:ext>
+    </p:extLst>
+  </p:cSld>
+  <p:clrMapOvr>
+    <a:masterClrMapping/>
+  </p:clrMapOvr>
+</p:sld>
+</file>
+
+<file path=ppt/slides/slide11.xml><?xml version="1.0" encoding="utf-8"?>
+<p:sld xmlns:a="http://schemas.openxmlformats.org/drawingml/2006/main" xmlns:r="http://schemas.openxmlformats.org/officeDocument/2006/relationships" xmlns:p="http://schemas.openxmlformats.org/presentationml/2006/main">
+  <p:cSld>
+    <p:spTree>
+      <p:nvGrpSpPr>
         <p:cNvPr id="1" name="Shape 137"/>
         <p:cNvGrpSpPr/>
         <p:nvPr/>
@@ -13911,7 +14299,7 @@
 </p:sld>
 </file>
 
-<file path=ppt/slides/slide11.xml><?xml version="1.0" encoding="utf-8"?>
+<file path=ppt/slides/slide12.xml><?xml version="1.0" encoding="utf-8"?>
 <p:sld xmlns:a="http://schemas.openxmlformats.org/drawingml/2006/main" xmlns:r="http://schemas.openxmlformats.org/officeDocument/2006/relationships" xmlns:p="http://schemas.openxmlformats.org/presentationml/2006/main">
   <p:cSld>
     <p:spTree>
@@ -14140,7 +14528,7 @@
 </p:sld>
 </file>
 
-<file path=ppt/slides/slide12.xml><?xml version="1.0" encoding="utf-8"?>
+<file path=ppt/slides/slide13.xml><?xml version="1.0" encoding="utf-8"?>
 <p:sld xmlns:a="http://schemas.openxmlformats.org/drawingml/2006/main" xmlns:r="http://schemas.openxmlformats.org/officeDocument/2006/relationships" xmlns:p="http://schemas.openxmlformats.org/presentationml/2006/main">
   <p:cSld>
     <p:spTree>
@@ -14428,7 +14816,7 @@
 </p:sld>
 </file>
 
-<file path=ppt/slides/slide13.xml><?xml version="1.0" encoding="utf-8"?>
+<file path=ppt/slides/slide14.xml><?xml version="1.0" encoding="utf-8"?>
 <p:sld xmlns:a="http://schemas.openxmlformats.org/drawingml/2006/main" xmlns:r="http://schemas.openxmlformats.org/officeDocument/2006/relationships" xmlns:p="http://schemas.openxmlformats.org/presentationml/2006/main">
   <p:cSld>
     <p:spTree>
@@ -15100,7 +15488,7 @@
 </p:sld>
 </file>
 
-<file path=ppt/slides/slide14.xml><?xml version="1.0" encoding="utf-8"?>
+<file path=ppt/slides/slide15.xml><?xml version="1.0" encoding="utf-8"?>
 <p:sld xmlns:a="http://schemas.openxmlformats.org/drawingml/2006/main" xmlns:r="http://schemas.openxmlformats.org/officeDocument/2006/relationships" xmlns:p="http://schemas.openxmlformats.org/presentationml/2006/main">
   <p:cSld>
     <p:spTree>
@@ -15149,7 +15537,7 @@
             </a:pPr>
             <a:fld id="{00000000-1234-1234-1234-123412341234}" type="slidenum">
               <a:rPr lang="en-US" smtClean="0"/>
-              <a:t>14</a:t>
+              <a:t>15</a:t>
             </a:fld>
             <a:endParaRPr lang="en-US"/>
           </a:p>
@@ -15645,7 +16033,7 @@
 </p:sld>
 </file>
 
-<file path=ppt/slides/slide15.xml><?xml version="1.0" encoding="utf-8"?>
+<file path=ppt/slides/slide16.xml><?xml version="1.0" encoding="utf-8"?>
 <p:sld xmlns:a="http://schemas.openxmlformats.org/drawingml/2006/main" xmlns:r="http://schemas.openxmlformats.org/officeDocument/2006/relationships" xmlns:p="http://schemas.openxmlformats.org/presentationml/2006/main">
   <p:cSld>
     <p:spTree>
@@ -15714,7 +16102,7 @@
             </a:pPr>
             <a:fld id="{00000000-1234-1234-1234-123412341234}" type="slidenum">
               <a:rPr lang="en-US"/>
-              <a:t>15</a:t>
+              <a:t>16</a:t>
             </a:fld>
             <a:endParaRPr/>
           </a:p>
@@ -15770,7 +16158,7 @@
                 <a:cs typeface="Economica"/>
                 <a:sym typeface="Economica"/>
               </a:rPr>
-              <a:t>Coding Assignment</a:t>
+              <a:t>Assignment 1</a:t>
             </a:r>
             <a:endParaRPr dirty="0"/>
           </a:p>
@@ -15863,7 +16251,7 @@
                 <a:cs typeface="Quicksand"/>
                 <a:sym typeface="Quicksand"/>
               </a:rPr>
-              <a:t>I am providing you with a sample of real data from the Blue Bikeshare service (Boston bikeshare).</a:t>
+              <a:t>I will provide you with a sample of real data from the Blue Bikeshare service (Boston bikeshare).</a:t>
             </a:r>
             <a:endParaRPr dirty="0"/>
           </a:p>
@@ -15892,7 +16280,7 @@
                 <a:cs typeface="Quicksand"/>
                 <a:sym typeface="Quicksand"/>
               </a:rPr>
-              <a:t>Your goal is to use this data to predict how long an individual’s bike rental / trip will last (at the time they begin the rental). See instructions for the assignment on </a:t>
+              <a:t>Your goal is to use this data to predict how long an individual’s bike rental / trip will last (at the time they begin the rental). You will see instructions for the assignment on </a:t>
             </a:r>
             <a:r>
               <a:rPr lang="en-US" sz="1800" b="0" i="0" u="none" strike="noStrike" cap="none" dirty="0" err="1">
@@ -16215,7 +16603,7 @@
 </p:sld>
 </file>
 
-<file path=ppt/slides/slide16.xml><?xml version="1.0" encoding="utf-8"?>
+<file path=ppt/slides/slide17.xml><?xml version="1.0" encoding="utf-8"?>
 <p:sld xmlns:a="http://schemas.openxmlformats.org/drawingml/2006/main" xmlns:r="http://schemas.openxmlformats.org/officeDocument/2006/relationships" xmlns:p="http://schemas.openxmlformats.org/presentationml/2006/main">
   <p:cSld>
     <p:spTree>
@@ -16272,7 +16660,7 @@
             </a:pPr>
             <a:fld id="{00000000-1234-1234-1234-123412341234}" type="slidenum">
               <a:rPr lang="en-US"/>
-              <a:t>16</a:t>
+              <a:t>17</a:t>
             </a:fld>
             <a:endParaRPr/>
           </a:p>
@@ -16286,8 +16674,8 @@
         </p:nvSpPr>
         <p:spPr>
           <a:xfrm>
-            <a:off x="1267239" y="2967335"/>
-            <a:ext cx="9657521" cy="923330"/>
+            <a:off x="1267239" y="2207171"/>
+            <a:ext cx="9657521" cy="1754286"/>
           </a:xfrm>
           <a:prstGeom prst="rect">
             <a:avLst/>
@@ -16322,6 +16710,29 @@
                 <a:cs typeface="Economica"/>
                 <a:sym typeface="Economica"/>
               </a:rPr>
+              <a:t>I’ll Post in a Sec, and You Can </a:t>
+            </a:r>
+            <a:br>
+              <a:rPr lang="en-US" sz="5400" dirty="0">
+                <a:solidFill>
+                  <a:schemeClr val="dk1"/>
+                </a:solidFill>
+                <a:latin typeface="Economica"/>
+                <a:ea typeface="Economica"/>
+                <a:cs typeface="Economica"/>
+                <a:sym typeface="Economica"/>
+              </a:rPr>
+            </a:br>
+            <a:r>
+              <a:rPr lang="en-US" sz="5400" dirty="0">
+                <a:solidFill>
+                  <a:schemeClr val="dk1"/>
+                </a:solidFill>
+                <a:latin typeface="Economica"/>
+                <a:ea typeface="Economica"/>
+                <a:cs typeface="Economica"/>
+                <a:sym typeface="Economica"/>
+              </a:rPr>
               <a:t>Start Working Now… </a:t>
             </a:r>
             <a:endParaRPr dirty="0"/>
@@ -16337,6 +16748,209 @@
 </file>
 
 <file path=ppt/slides/slide2.xml><?xml version="1.0" encoding="utf-8"?>
+<p:sld xmlns:a="http://schemas.openxmlformats.org/drawingml/2006/main" xmlns:r="http://schemas.openxmlformats.org/officeDocument/2006/relationships" xmlns:p="http://schemas.openxmlformats.org/presentationml/2006/main">
+  <p:cSld>
+    <p:bg>
+      <p:bgPr>
+        <a:solidFill>
+          <a:srgbClr val="F9F9F9"/>
+        </a:solidFill>
+        <a:effectLst/>
+      </p:bgPr>
+    </p:bg>
+    <p:spTree>
+      <p:nvGrpSpPr>
+        <p:cNvPr id="1" name="Shape 107"/>
+        <p:cNvGrpSpPr/>
+        <p:nvPr/>
+      </p:nvGrpSpPr>
+      <p:grpSpPr>
+        <a:xfrm>
+          <a:off x="0" y="0"/>
+          <a:ext cx="0" cy="0"/>
+          <a:chOff x="0" y="0"/>
+          <a:chExt cx="0" cy="0"/>
+        </a:xfrm>
+      </p:grpSpPr>
+      <p:sp>
+        <p:nvSpPr>
+          <p:cNvPr id="108" name="Google Shape;108;p3"/>
+          <p:cNvSpPr txBox="1"/>
+          <p:nvPr/>
+        </p:nvSpPr>
+        <p:spPr>
+          <a:xfrm>
+            <a:off x="1075414" y="752504"/>
+            <a:ext cx="6460957" cy="923330"/>
+          </a:xfrm>
+          <a:prstGeom prst="rect">
+            <a:avLst/>
+          </a:prstGeom>
+          <a:noFill/>
+          <a:ln>
+            <a:noFill/>
+          </a:ln>
+        </p:spPr>
+        <p:txBody>
+          <a:bodyPr spcFirstLastPara="1" wrap="square" lIns="91425" tIns="45700" rIns="91425" bIns="45700" anchor="t" anchorCtr="0">
+            <a:spAutoFit/>
+          </a:bodyPr>
+          <a:lstStyle/>
+          <a:p>
+            <a:pPr marL="0" marR="0" lvl="0" indent="0" algn="ctr" rtl="0">
+              <a:spcBef>
+                <a:spcPts val="0"/>
+              </a:spcBef>
+              <a:spcAft>
+                <a:spcPts val="0"/>
+              </a:spcAft>
+              <a:buNone/>
+            </a:pPr>
+            <a:r>
+              <a:rPr lang="en-US" sz="5400" dirty="0">
+                <a:solidFill>
+                  <a:schemeClr val="dk1"/>
+                </a:solidFill>
+                <a:latin typeface="Economica"/>
+                <a:ea typeface="Economica"/>
+                <a:cs typeface="Economica"/>
+                <a:sym typeface="Economica"/>
+              </a:rPr>
+              <a:t>What’s In the News?</a:t>
+            </a:r>
+            <a:endParaRPr dirty="0"/>
+          </a:p>
+        </p:txBody>
+      </p:sp>
+      <p:pic>
+        <p:nvPicPr>
+          <p:cNvPr id="2" name="Picture 1">
+            <a:extLst>
+              <a:ext uri="{FF2B5EF4-FFF2-40B4-BE49-F238E27FC236}">
+                <a16:creationId xmlns:a16="http://schemas.microsoft.com/office/drawing/2014/main" id="{EE1BA6FC-6600-1D21-A58E-80A98A245676}"/>
+              </a:ext>
+            </a:extLst>
+          </p:cNvPr>
+          <p:cNvPicPr>
+            <a:picLocks noChangeAspect="1"/>
+          </p:cNvPicPr>
+          <p:nvPr/>
+        </p:nvPicPr>
+        <p:blipFill>
+          <a:blip r:embed="rId3"/>
+          <a:stretch>
+            <a:fillRect/>
+          </a:stretch>
+        </p:blipFill>
+        <p:spPr>
+          <a:xfrm>
+            <a:off x="484741" y="2449057"/>
+            <a:ext cx="5472442" cy="3017453"/>
+          </a:xfrm>
+          <a:prstGeom prst="rect">
+            <a:avLst/>
+          </a:prstGeom>
+          <a:ln>
+            <a:noFill/>
+          </a:ln>
+          <a:effectLst>
+            <a:outerShdw blurRad="292100" dist="139700" dir="2700000" algn="tl" rotWithShape="0">
+              <a:srgbClr val="333333">
+                <a:alpha val="65000"/>
+              </a:srgbClr>
+            </a:outerShdw>
+          </a:effectLst>
+        </p:spPr>
+      </p:pic>
+      <p:pic>
+        <p:nvPicPr>
+          <p:cNvPr id="4" name="Picture 3">
+            <a:extLst>
+              <a:ext uri="{FF2B5EF4-FFF2-40B4-BE49-F238E27FC236}">
+                <a16:creationId xmlns:a16="http://schemas.microsoft.com/office/drawing/2014/main" id="{43C0C34A-4744-9359-3A93-7AE6A4642FAF}"/>
+              </a:ext>
+            </a:extLst>
+          </p:cNvPr>
+          <p:cNvPicPr>
+            <a:picLocks noChangeAspect="1"/>
+          </p:cNvPicPr>
+          <p:nvPr/>
+        </p:nvPicPr>
+        <p:blipFill>
+          <a:blip r:embed="rId4"/>
+          <a:stretch>
+            <a:fillRect/>
+          </a:stretch>
+        </p:blipFill>
+        <p:spPr>
+          <a:xfrm>
+            <a:off x="6472881" y="2744370"/>
+            <a:ext cx="5234378" cy="3903091"/>
+          </a:xfrm>
+          <a:prstGeom prst="rect">
+            <a:avLst/>
+          </a:prstGeom>
+          <a:ln>
+            <a:noFill/>
+          </a:ln>
+          <a:effectLst>
+            <a:outerShdw blurRad="292100" dist="139700" dir="2700000" algn="tl" rotWithShape="0">
+              <a:srgbClr val="333333">
+                <a:alpha val="65000"/>
+              </a:srgbClr>
+            </a:outerShdw>
+          </a:effectLst>
+        </p:spPr>
+      </p:pic>
+      <p:pic>
+        <p:nvPicPr>
+          <p:cNvPr id="5" name="Picture 4">
+            <a:extLst>
+              <a:ext uri="{FF2B5EF4-FFF2-40B4-BE49-F238E27FC236}">
+                <a16:creationId xmlns:a16="http://schemas.microsoft.com/office/drawing/2014/main" id="{3C00EE1C-4B9B-C627-A2E3-B25EA9C2D47B}"/>
+              </a:ext>
+            </a:extLst>
+          </p:cNvPr>
+          <p:cNvPicPr>
+            <a:picLocks noChangeAspect="1"/>
+          </p:cNvPicPr>
+          <p:nvPr/>
+        </p:nvPicPr>
+        <p:blipFill>
+          <a:blip r:embed="rId5"/>
+          <a:stretch>
+            <a:fillRect/>
+          </a:stretch>
+        </p:blipFill>
+        <p:spPr>
+          <a:xfrm>
+            <a:off x="7454108" y="600411"/>
+            <a:ext cx="3107397" cy="1848646"/>
+          </a:xfrm>
+          <a:prstGeom prst="rect">
+            <a:avLst/>
+          </a:prstGeom>
+          <a:ln>
+            <a:noFill/>
+          </a:ln>
+          <a:effectLst>
+            <a:outerShdw blurRad="292100" dist="139700" dir="2700000" algn="tl" rotWithShape="0">
+              <a:srgbClr val="333333">
+                <a:alpha val="65000"/>
+              </a:srgbClr>
+            </a:outerShdw>
+          </a:effectLst>
+        </p:spPr>
+      </p:pic>
+    </p:spTree>
+  </p:cSld>
+  <p:clrMapOvr>
+    <a:masterClrMapping/>
+  </p:clrMapOvr>
+</p:sld>
+</file>
+
+<file path=ppt/slides/slide3.xml><?xml version="1.0" encoding="utf-8"?>
 <p:sld xmlns:a="http://schemas.openxmlformats.org/drawingml/2006/main" xmlns:r="http://schemas.openxmlformats.org/officeDocument/2006/relationships" xmlns:p="http://schemas.openxmlformats.org/presentationml/2006/main">
   <p:cSld>
     <p:spTree>
@@ -16694,7 +17308,7 @@
                 <a:cs typeface="Quicksand"/>
                 <a:sym typeface="Quicksand"/>
               </a:rPr>
-              <a:t>Introducing the Individual Coding Assignment </a:t>
+              <a:t>Introducing Assignment 1</a:t>
             </a:r>
           </a:p>
           <a:p>
@@ -16776,7 +17390,7 @@
 </p:sld>
 </file>
 
-<file path=ppt/slides/slide3.xml><?xml version="1.0" encoding="utf-8"?>
+<file path=ppt/slides/slide4.xml><?xml version="1.0" encoding="utf-8"?>
 <p:sld xmlns:a="http://schemas.openxmlformats.org/drawingml/2006/main" xmlns:r="http://schemas.openxmlformats.org/officeDocument/2006/relationships" xmlns:p="http://schemas.openxmlformats.org/presentationml/2006/main">
   <p:cSld>
     <p:spTree>
@@ -17104,7 +17718,7 @@
 </p:sld>
 </file>
 
-<file path=ppt/slides/slide4.xml><?xml version="1.0" encoding="utf-8"?>
+<file path=ppt/slides/slide5.xml><?xml version="1.0" encoding="utf-8"?>
 <p:sld xmlns:a="http://schemas.openxmlformats.org/drawingml/2006/main" xmlns:r="http://schemas.openxmlformats.org/officeDocument/2006/relationships" xmlns:p="http://schemas.openxmlformats.org/presentationml/2006/main">
   <p:cSld>
     <p:bg>
@@ -17390,7 +18004,7 @@
 </p:sld>
 </file>
 
-<file path=ppt/slides/slide5.xml><?xml version="1.0" encoding="utf-8"?>
+<file path=ppt/slides/slide6.xml><?xml version="1.0" encoding="utf-8"?>
 <p:sld xmlns:a="http://schemas.openxmlformats.org/drawingml/2006/main" xmlns:r="http://schemas.openxmlformats.org/officeDocument/2006/relationships" xmlns:p="http://schemas.openxmlformats.org/presentationml/2006/main">
   <p:cSld>
     <p:bg>
@@ -17537,7 +18151,7 @@
 </p:sld>
 </file>
 
-<file path=ppt/slides/slide6.xml><?xml version="1.0" encoding="utf-8"?>
+<file path=ppt/slides/slide7.xml><?xml version="1.0" encoding="utf-8"?>
 <p:sld xmlns:a="http://schemas.openxmlformats.org/drawingml/2006/main" xmlns:r="http://schemas.openxmlformats.org/officeDocument/2006/relationships" xmlns:p="http://schemas.openxmlformats.org/presentationml/2006/main">
   <p:cSld>
     <p:spTree>
@@ -17772,7 +18386,7 @@
 </p:sld>
 </file>
 
-<file path=ppt/slides/slide7.xml><?xml version="1.0" encoding="utf-8"?>
+<file path=ppt/slides/slide8.xml><?xml version="1.0" encoding="utf-8"?>
 <p:sld xmlns:a="http://schemas.openxmlformats.org/drawingml/2006/main" xmlns:r="http://schemas.openxmlformats.org/officeDocument/2006/relationships" xmlns:p="http://schemas.openxmlformats.org/presentationml/2006/main">
   <p:cSld>
     <p:bg>
@@ -18231,7 +18845,7 @@
 </p:sld>
 </file>
 
-<file path=ppt/slides/slide8.xml><?xml version="1.0" encoding="utf-8"?>
+<file path=ppt/slides/slide9.xml><?xml version="1.0" encoding="utf-8"?>
 <p:sld xmlns:a="http://schemas.openxmlformats.org/drawingml/2006/main" xmlns:r="http://schemas.openxmlformats.org/officeDocument/2006/relationships" xmlns:p="http://schemas.openxmlformats.org/presentationml/2006/main">
   <p:cSld>
     <p:spTree>
@@ -18459,289 +19073,6 @@
         </p:spPr>
       </p:pic>
     </p:spTree>
-  </p:cSld>
-  <p:clrMapOvr>
-    <a:masterClrMapping/>
-  </p:clrMapOvr>
-</p:sld>
-</file>
-
-<file path=ppt/slides/slide9.xml><?xml version="1.0" encoding="utf-8"?>
-<p:sld xmlns:a="http://schemas.openxmlformats.org/drawingml/2006/main" xmlns:r="http://schemas.openxmlformats.org/officeDocument/2006/relationships" xmlns:p="http://schemas.openxmlformats.org/presentationml/2006/main">
-  <p:cSld>
-    <p:spTree>
-      <p:nvGrpSpPr>
-        <p:cNvPr id="1" name="Shape 130">
-          <a:extLst>
-            <a:ext uri="{FF2B5EF4-FFF2-40B4-BE49-F238E27FC236}">
-              <a16:creationId xmlns:a16="http://schemas.microsoft.com/office/drawing/2014/main" id="{F8A5A9F4-C20D-E42F-765F-1C95A4A28D76}"/>
-            </a:ext>
-          </a:extLst>
-        </p:cNvPr>
-        <p:cNvGrpSpPr/>
-        <p:nvPr/>
-      </p:nvGrpSpPr>
-      <p:grpSpPr>
-        <a:xfrm>
-          <a:off x="0" y="0"/>
-          <a:ext cx="0" cy="0"/>
-          <a:chOff x="0" y="0"/>
-          <a:chExt cx="0" cy="0"/>
-        </a:xfrm>
-      </p:grpSpPr>
-      <p:sp>
-        <p:nvSpPr>
-          <p:cNvPr id="131" name="Google Shape;131;p6">
-            <a:extLst>
-              <a:ext uri="{FF2B5EF4-FFF2-40B4-BE49-F238E27FC236}">
-                <a16:creationId xmlns:a16="http://schemas.microsoft.com/office/drawing/2014/main" id="{546E8232-62B7-D42C-1E89-41CA0C69E8AB}"/>
-              </a:ext>
-            </a:extLst>
-          </p:cNvPr>
-          <p:cNvSpPr txBox="1"/>
-          <p:nvPr/>
-        </p:nvSpPr>
-        <p:spPr>
-          <a:xfrm>
-            <a:off x="2865521" y="586938"/>
-            <a:ext cx="6460957" cy="923330"/>
-          </a:xfrm>
-          <a:prstGeom prst="rect">
-            <a:avLst/>
-          </a:prstGeom>
-          <a:noFill/>
-          <a:ln>
-            <a:noFill/>
-          </a:ln>
-        </p:spPr>
-        <p:txBody>
-          <a:bodyPr spcFirstLastPara="1" wrap="square" lIns="91425" tIns="45700" rIns="91425" bIns="45700" anchor="t" anchorCtr="0">
-            <a:spAutoFit/>
-          </a:bodyPr>
-          <a:lstStyle/>
-          <a:p>
-            <a:pPr marL="0" marR="0" lvl="0" indent="0" algn="ctr" rtl="0">
-              <a:spcBef>
-                <a:spcPts val="0"/>
-              </a:spcBef>
-              <a:spcAft>
-                <a:spcPts val="0"/>
-              </a:spcAft>
-              <a:buNone/>
-            </a:pPr>
-            <a:r>
-              <a:rPr lang="en-US" sz="5400" dirty="0">
-                <a:solidFill>
-                  <a:schemeClr val="dk1"/>
-                </a:solidFill>
-                <a:latin typeface="Economica"/>
-                <a:ea typeface="Economica"/>
-                <a:cs typeface="Economica"/>
-                <a:sym typeface="Economica"/>
-              </a:rPr>
-              <a:t>Batch Normalization</a:t>
-            </a:r>
-            <a:endParaRPr dirty="0"/>
-          </a:p>
-        </p:txBody>
-      </p:sp>
-      <p:sp>
-        <p:nvSpPr>
-          <p:cNvPr id="132" name="Google Shape;132;p6">
-            <a:extLst>
-              <a:ext uri="{FF2B5EF4-FFF2-40B4-BE49-F238E27FC236}">
-                <a16:creationId xmlns:a16="http://schemas.microsoft.com/office/drawing/2014/main" id="{C6C7B91E-7FB5-0741-0846-F1C44B3F842F}"/>
-              </a:ext>
-            </a:extLst>
-          </p:cNvPr>
-          <p:cNvSpPr txBox="1"/>
-          <p:nvPr/>
-        </p:nvSpPr>
-        <p:spPr>
-          <a:xfrm>
-            <a:off x="890337" y="1940249"/>
-            <a:ext cx="10016362" cy="3662501"/>
-          </a:xfrm>
-          <a:prstGeom prst="rect">
-            <a:avLst/>
-          </a:prstGeom>
-          <a:noFill/>
-          <a:ln>
-            <a:noFill/>
-          </a:ln>
-        </p:spPr>
-        <p:txBody>
-          <a:bodyPr spcFirstLastPara="1" wrap="square" lIns="91425" tIns="45700" rIns="91425" bIns="45700" anchor="t" anchorCtr="0">
-            <a:spAutoFit/>
-          </a:bodyPr>
-          <a:lstStyle/>
-          <a:p>
-            <a:pPr marL="0" marR="0" lvl="0" indent="0" algn="l" rtl="0">
-              <a:spcBef>
-                <a:spcPts val="0"/>
-              </a:spcBef>
-              <a:spcAft>
-                <a:spcPts val="0"/>
-              </a:spcAft>
-              <a:buNone/>
-            </a:pPr>
-            <a:r>
-              <a:rPr lang="en-US" sz="2000" b="1" dirty="0">
-                <a:solidFill>
-                  <a:schemeClr val="dk1"/>
-                </a:solidFill>
-                <a:latin typeface="Quicksand"/>
-                <a:sym typeface="Quicksand"/>
-              </a:rPr>
-              <a:t>Re-scales batch coming into each layer, to make it unit-normal distributed. </a:t>
-            </a:r>
-            <a:endParaRPr dirty="0"/>
-          </a:p>
-          <a:p>
-            <a:pPr marL="171450" marR="0" lvl="0" indent="-82550" algn="l" rtl="0">
-              <a:spcBef>
-                <a:spcPts val="0"/>
-              </a:spcBef>
-              <a:spcAft>
-                <a:spcPts val="0"/>
-              </a:spcAft>
-              <a:buClr>
-                <a:schemeClr val="dk1"/>
-              </a:buClr>
-              <a:buSzPts val="1400"/>
-              <a:buFont typeface="Arial"/>
-              <a:buNone/>
-            </a:pPr>
-            <a:endParaRPr sz="1400" dirty="0">
-              <a:solidFill>
-                <a:schemeClr val="dk1"/>
-              </a:solidFill>
-              <a:latin typeface="Quicksand"/>
-              <a:ea typeface="Quicksand"/>
-              <a:cs typeface="Quicksand"/>
-              <a:sym typeface="Quicksand"/>
-            </a:endParaRPr>
-          </a:p>
-          <a:p>
-            <a:pPr marL="628650" marR="0" lvl="1" indent="-171450" algn="l" rtl="0">
-              <a:spcBef>
-                <a:spcPts val="0"/>
-              </a:spcBef>
-              <a:spcAft>
-                <a:spcPts val="0"/>
-              </a:spcAft>
-              <a:buClr>
-                <a:schemeClr val="dk1"/>
-              </a:buClr>
-              <a:buSzPts val="1800"/>
-              <a:buFont typeface="Arial"/>
-              <a:buChar char="•"/>
-            </a:pPr>
-            <a:r>
-              <a:rPr lang="en-US" sz="1800" b="0" i="0" u="none" strike="noStrike" cap="none" dirty="0">
-                <a:solidFill>
-                  <a:schemeClr val="dk1"/>
-                </a:solidFill>
-                <a:latin typeface="Quicksand"/>
-                <a:ea typeface="Quicksand"/>
-                <a:cs typeface="Quicksand"/>
-                <a:sym typeface="Quicksand"/>
-              </a:rPr>
-              <a:t>The primary reason for these layers is to improve/speed up trainin</a:t>
-            </a:r>
-            <a:r>
-              <a:rPr lang="en-US" sz="1800" dirty="0">
-                <a:solidFill>
-                  <a:schemeClr val="dk1"/>
-                </a:solidFill>
-                <a:latin typeface="Quicksand"/>
-                <a:ea typeface="Quicksand"/>
-                <a:cs typeface="Quicksand"/>
-                <a:sym typeface="Quicksand"/>
-              </a:rPr>
-              <a:t>g. Absent this, changes to up-funnel weights cause ‘shifts’ in the distribution of data entering later layers. Later layers’ weights need to be updated constantly to adapt to those up-stream shifts. Batch normalization removes this issue. </a:t>
-            </a:r>
-            <a:br>
-              <a:rPr lang="en-US" sz="1800" dirty="0">
-                <a:solidFill>
-                  <a:schemeClr val="dk1"/>
-                </a:solidFill>
-                <a:latin typeface="Quicksand"/>
-                <a:ea typeface="Quicksand"/>
-                <a:cs typeface="Quicksand"/>
-                <a:sym typeface="Quicksand"/>
-              </a:rPr>
-            </a:br>
-            <a:endParaRPr lang="en-US" sz="1800" dirty="0">
-              <a:solidFill>
-                <a:schemeClr val="dk1"/>
-              </a:solidFill>
-              <a:latin typeface="Quicksand"/>
-              <a:ea typeface="Quicksand"/>
-              <a:cs typeface="Quicksand"/>
-              <a:sym typeface="Quicksand"/>
-            </a:endParaRPr>
-          </a:p>
-          <a:p>
-            <a:pPr marL="628650" marR="0" lvl="1" indent="-171450" algn="l" rtl="0">
-              <a:spcBef>
-                <a:spcPts val="0"/>
-              </a:spcBef>
-              <a:spcAft>
-                <a:spcPts val="0"/>
-              </a:spcAft>
-              <a:buClr>
-                <a:schemeClr val="dk1"/>
-              </a:buClr>
-              <a:buSzPts val="1800"/>
-              <a:buFont typeface="Arial"/>
-              <a:buChar char="•"/>
-            </a:pPr>
-            <a:r>
-              <a:rPr lang="en-US" sz="1800" dirty="0">
-                <a:solidFill>
-                  <a:schemeClr val="dk1"/>
-                </a:solidFill>
-                <a:latin typeface="Quicksand"/>
-                <a:sym typeface="Quicksand"/>
-              </a:rPr>
-              <a:t>A by-product of batch normalization is that it acts like a weak form of Dropout, because normalization is implemented based on the current batch of data. Mean and variance estimates from the current batch are a noisy reflection of population mean and variance. Hence, we get some noise being injected in the training process as a result.</a:t>
-            </a:r>
-            <a:endParaRPr dirty="0"/>
-          </a:p>
-          <a:p>
-            <a:pPr marL="628650" marR="0" lvl="1" indent="-57150" algn="l" rtl="0">
-              <a:spcBef>
-                <a:spcPts val="0"/>
-              </a:spcBef>
-              <a:spcAft>
-                <a:spcPts val="0"/>
-              </a:spcAft>
-              <a:buClr>
-                <a:schemeClr val="dk1"/>
-              </a:buClr>
-              <a:buSzPts val="1800"/>
-              <a:buFont typeface="Arial"/>
-              <a:buNone/>
-            </a:pPr>
-            <a:endParaRPr sz="1800" b="0" i="0" u="none" strike="noStrike" cap="none" dirty="0">
-              <a:solidFill>
-                <a:schemeClr val="dk1"/>
-              </a:solidFill>
-              <a:latin typeface="Quicksand"/>
-              <a:ea typeface="Quicksand"/>
-              <a:cs typeface="Quicksand"/>
-              <a:sym typeface="Quicksand"/>
-            </a:endParaRPr>
-          </a:p>
-        </p:txBody>
-      </p:sp>
-    </p:spTree>
-    <p:extLst>
-      <p:ext uri="{BB962C8B-B14F-4D97-AF65-F5344CB8AC3E}">
-        <p14:creationId xmlns:p14="http://schemas.microsoft.com/office/powerpoint/2010/main" val="2210597179"/>
-      </p:ext>
-    </p:extLst>
   </p:cSld>
   <p:clrMapOvr>
     <a:masterClrMapping/>
